--- a/classes/parte-3-estadistica-inferencial/181-correccion-de-comparaciones-multiples-bonferroni-fdr/clase-181-correccion-de-comparaciones-multiples-bonferroni-fdr-presentacion.pptx
+++ b/classes/parte-3-estadistica-inferencial/181-correccion-de-comparaciones-multiples-bonferroni-fdr/clase-181-correccion-de-comparaciones-multiples-bonferroni-fdr-presentacion.pptx
@@ -4845,7 +4845,7 @@
                 </a:solidFill>
                 <a:latin typeface="Segoe UI"/>
               </a:rPr>
-              <a:t>Primer bloque ejecutable del notebook.</a:t>
+              <a:t>Con m tests independientes y H₀ verdadera, P(≥1 falso positivo) = 1 - (1-α)^m. Lo verificamos por simulación.</a:t>
             </a:r>
           </a:p>
         </p:txBody>
@@ -4932,7 +4932,330 @@
                 </a:solidFill>
                 <a:latin typeface="Courier New"/>
               </a:rPr>
-              <a:t># Imports y configuración inicial</a:t>
+              <a:t>import numpy as np</a:t>
+            </a:r>
+          </a:p>
+          <a:p>
+            <a:pPr>
+              <a:defRPr sz="1200" b="0">
+                <a:solidFill>
+                  <a:srgbClr val="F8FAFC"/>
+                </a:solidFill>
+                <a:latin typeface="Courier New"/>
+              </a:defRPr>
+            </a:pPr>
+            <a:r>
+              <a:rPr sz="1200" b="0">
+                <a:solidFill>
+                  <a:srgbClr val="F8FAFC"/>
+                </a:solidFill>
+                <a:latin typeface="Courier New"/>
+              </a:rPr>
+              <a:t>import pandas as pd</a:t>
+            </a:r>
+          </a:p>
+          <a:p>
+            <a:pPr>
+              <a:defRPr sz="1200" b="0">
+                <a:solidFill>
+                  <a:srgbClr val="F8FAFC"/>
+                </a:solidFill>
+                <a:latin typeface="Courier New"/>
+              </a:defRPr>
+            </a:pPr>
+            <a:r>
+              <a:rPr sz="1200" b="0">
+                <a:solidFill>
+                  <a:srgbClr val="F8FAFC"/>
+                </a:solidFill>
+                <a:latin typeface="Courier New"/>
+              </a:rPr>
+              <a:t>from scipy import stats</a:t>
+            </a:r>
+          </a:p>
+          <a:p>
+            <a:pPr>
+              <a:defRPr sz="1200" b="0">
+                <a:solidFill>
+                  <a:srgbClr val="F8FAFC"/>
+                </a:solidFill>
+                <a:latin typeface="Courier New"/>
+              </a:defRPr>
+            </a:pPr>
+            <a:r>
+              <a:rPr sz="1200" b="0">
+                <a:solidFill>
+                  <a:srgbClr val="F8FAFC"/>
+                </a:solidFill>
+                <a:latin typeface="Courier New"/>
+              </a:rPr>
+              <a:t>from statsmodels.stats.multitest import multipletests</a:t>
+            </a:r>
+          </a:p>
+          <a:p>
+            <a:pPr>
+              <a:defRPr sz="1200" b="0">
+                <a:solidFill>
+                  <a:srgbClr val="F8FAFC"/>
+                </a:solidFill>
+                <a:latin typeface="Courier New"/>
+              </a:defRPr>
+            </a:pPr>
+            <a:r>
+              <a:rPr sz="1200" b="0">
+                <a:solidFill>
+                  <a:srgbClr val="F8FAFC"/>
+                </a:solidFill>
+                <a:latin typeface="Courier New"/>
+              </a:rPr>
+              <a:t>import matplotlib.pyplot as plt</a:t>
+            </a:r>
+          </a:p>
+          <a:p>
+            <a:pPr>
+              <a:defRPr sz="1200" b="0">
+                <a:solidFill>
+                  <a:srgbClr val="F8FAFC"/>
+                </a:solidFill>
+                <a:latin typeface="Courier New"/>
+              </a:defRPr>
+            </a:pPr>
+            <a:r>
+              <a:rPr sz="1200" b="0">
+                <a:solidFill>
+                  <a:srgbClr val="F8FAFC"/>
+                </a:solidFill>
+                <a:latin typeface="Courier New"/>
+              </a:rPr>
+              <a:t> </a:t>
+            </a:r>
+          </a:p>
+          <a:p>
+            <a:pPr>
+              <a:defRPr sz="1200" b="0">
+                <a:solidFill>
+                  <a:srgbClr val="F8FAFC"/>
+                </a:solidFill>
+                <a:latin typeface="Courier New"/>
+              </a:defRPr>
+            </a:pPr>
+            <a:r>
+              <a:rPr sz="1200" b="0">
+                <a:solidFill>
+                  <a:srgbClr val="F8FAFC"/>
+                </a:solidFill>
+                <a:latin typeface="Courier New"/>
+              </a:rPr>
+              <a:t>rng = np.random.default_rng(42)</a:t>
+            </a:r>
+          </a:p>
+          <a:p>
+            <a:pPr>
+              <a:defRPr sz="1200" b="0">
+                <a:solidFill>
+                  <a:srgbClr val="F8FAFC"/>
+                </a:solidFill>
+                <a:latin typeface="Courier New"/>
+              </a:defRPr>
+            </a:pPr>
+            <a:r>
+              <a:rPr sz="1200" b="0">
+                <a:solidFill>
+                  <a:srgbClr val="F8FAFC"/>
+                </a:solidFill>
+                <a:latin typeface="Courier New"/>
+              </a:rPr>
+              <a:t> </a:t>
+            </a:r>
+          </a:p>
+          <a:p>
+            <a:pPr>
+              <a:defRPr sz="1200" b="0">
+                <a:solidFill>
+                  <a:srgbClr val="F8FAFC"/>
+                </a:solidFill>
+                <a:latin typeface="Courier New"/>
+              </a:defRPr>
+            </a:pPr>
+            <a:r>
+              <a:rPr sz="1200" b="0">
+                <a:solidFill>
+                  <a:srgbClr val="F8FAFC"/>
+                </a:solidFill>
+                <a:latin typeface="Courier New"/>
+              </a:rPr>
+              <a:t>m = 20</a:t>
+            </a:r>
+          </a:p>
+          <a:p>
+            <a:pPr>
+              <a:defRPr sz="1200" b="0">
+                <a:solidFill>
+                  <a:srgbClr val="F8FAFC"/>
+                </a:solidFill>
+                <a:latin typeface="Courier New"/>
+              </a:defRPr>
+            </a:pPr>
+            <a:r>
+              <a:rPr sz="1200" b="0">
+                <a:solidFill>
+                  <a:srgbClr val="F8FAFC"/>
+                </a:solidFill>
+                <a:latin typeface="Courier New"/>
+              </a:rPr>
+              <a:t>n_exp = 2000</a:t>
+            </a:r>
+          </a:p>
+          <a:p>
+            <a:pPr>
+              <a:defRPr sz="1200" b="0">
+                <a:solidFill>
+                  <a:srgbClr val="F8FAFC"/>
+                </a:solidFill>
+                <a:latin typeface="Courier New"/>
+              </a:defRPr>
+            </a:pPr>
+            <a:r>
+              <a:rPr sz="1200" b="0">
+                <a:solidFill>
+                  <a:srgbClr val="F8FAFC"/>
+                </a:solidFill>
+                <a:latin typeface="Courier New"/>
+              </a:rPr>
+              <a:t>any_sig = 0</a:t>
+            </a:r>
+          </a:p>
+          <a:p>
+            <a:pPr>
+              <a:defRPr sz="1200" b="0">
+                <a:solidFill>
+                  <a:srgbClr val="F8FAFC"/>
+                </a:solidFill>
+                <a:latin typeface="Courier New"/>
+              </a:defRPr>
+            </a:pPr>
+            <a:r>
+              <a:rPr sz="1200" b="0">
+                <a:solidFill>
+                  <a:srgbClr val="F8FAFC"/>
+                </a:solidFill>
+                <a:latin typeface="Courier New"/>
+              </a:rPr>
+              <a:t>for _ in range(n_exp):</a:t>
+            </a:r>
+          </a:p>
+          <a:p>
+            <a:pPr>
+              <a:defRPr sz="1200" b="0">
+                <a:solidFill>
+                  <a:srgbClr val="F8FAFC"/>
+                </a:solidFill>
+                <a:latin typeface="Courier New"/>
+              </a:defRPr>
+            </a:pPr>
+            <a:r>
+              <a:rPr sz="1200" b="0">
+                <a:solidFill>
+                  <a:srgbClr val="F8FAFC"/>
+                </a:solidFill>
+                <a:latin typeface="Courier New"/>
+              </a:rPr>
+              <a:t>    pvals = [stats.ttest_ind(rng.normal(0, 1, 30), rng.normal(0, 1, 30)).pvalue for _ in range(m)]</a:t>
+            </a:r>
+          </a:p>
+          <a:p>
+            <a:pPr>
+              <a:defRPr sz="1200" b="0">
+                <a:solidFill>
+                  <a:srgbClr val="F8FAFC"/>
+                </a:solidFill>
+                <a:latin typeface="Courier New"/>
+              </a:defRPr>
+            </a:pPr>
+            <a:r>
+              <a:rPr sz="1200" b="0">
+                <a:solidFill>
+                  <a:srgbClr val="F8FAFC"/>
+                </a:solidFill>
+                <a:latin typeface="Courier New"/>
+              </a:rPr>
+              <a:t>    any_sig += (min(pvals) &lt; 0.05)</a:t>
+            </a:r>
+          </a:p>
+          <a:p>
+            <a:pPr>
+              <a:defRPr sz="1200" b="0">
+                <a:solidFill>
+                  <a:srgbClr val="F8FAFC"/>
+                </a:solidFill>
+                <a:latin typeface="Courier New"/>
+              </a:defRPr>
+            </a:pPr>
+            <a:r>
+              <a:rPr sz="1200" b="0">
+                <a:solidFill>
+                  <a:srgbClr val="F8FAFC"/>
+                </a:solidFill>
+                <a:latin typeface="Courier New"/>
+              </a:rPr>
+              <a:t>emp = any_sig / n_exp</a:t>
+            </a:r>
+          </a:p>
+          <a:p>
+            <a:pPr>
+              <a:defRPr sz="1200" b="0">
+                <a:solidFill>
+                  <a:srgbClr val="F8FAFC"/>
+                </a:solidFill>
+                <a:latin typeface="Courier New"/>
+              </a:defRPr>
+            </a:pPr>
+            <a:r>
+              <a:rPr sz="1200" b="0">
+                <a:solidFill>
+                  <a:srgbClr val="F8FAFC"/>
+                </a:solidFill>
+                <a:latin typeface="Courier New"/>
+              </a:rPr>
+              <a:t>theo = 1 - 0.95 ** m</a:t>
+            </a:r>
+          </a:p>
+          <a:p>
+            <a:pPr>
+              <a:defRPr sz="1200" b="0">
+                <a:solidFill>
+                  <a:srgbClr val="F8FAFC"/>
+                </a:solidFill>
+                <a:latin typeface="Courier New"/>
+              </a:defRPr>
+            </a:pPr>
+            <a:r>
+              <a:rPr sz="1200" b="0">
+                <a:solidFill>
+                  <a:srgbClr val="F8FAFC"/>
+                </a:solidFill>
+                <a:latin typeface="Courier New"/>
+              </a:rPr>
+              <a:t>print(f"P(≥1 falso positivo): empírico={emp:.3f}  teórico={theo:.3f}")</a:t>
+            </a:r>
+          </a:p>
+          <a:p>
+            <a:pPr>
+              <a:defRPr sz="1200" b="0">
+                <a:solidFill>
+                  <a:srgbClr val="F8FAFC"/>
+                </a:solidFill>
+                <a:latin typeface="Courier New"/>
+              </a:defRPr>
+            </a:pPr>
+            <a:r>
+              <a:rPr sz="1200" b="0">
+                <a:solidFill>
+                  <a:srgbClr val="F8FAFC"/>
+                </a:solidFill>
+                <a:latin typeface="Courier New"/>
+              </a:rPr>
+              <a:t>assert abs(emp - theo) &lt; 0.05</a:t>
             </a:r>
           </a:p>
         </p:txBody>

--- a/classes/parte-3-estadistica-inferencial/181-correccion-de-comparaciones-multiples-bonferroni-fdr/clase-181-correccion-de-comparaciones-multiples-bonferroni-fdr-presentacion.pptx
+++ b/classes/parte-3-estadistica-inferencial/181-correccion-de-comparaciones-multiples-bonferroni-fdr/clase-181-correccion-de-comparaciones-multiples-bonferroni-fdr-presentacion.pptx
@@ -3272,7 +3272,7 @@
                 </a:solidFill>
                 <a:latin typeface="Segoe UI"/>
               </a:rPr>
-              <a:t>Parte: 3 — Estadística Inferencial y Causal · Fuente: ISLP, cap. 13 Multiple Testing + Benjamini &amp; Hochberg (1995).  Duración estimada: 70 min.</a:t>
+              <a:t>Parte: 3 — Estadística Inferencial y Causal · Fuente: ISLP, cap. 13 Multiple Testing + Benjamini &amp; Hochberg (1995).  Duración estimada: 70 min. · Nivel: Intermedio-Avanzado</a:t>
             </a:r>
           </a:p>
         </p:txBody>
@@ -3581,7 +3581,7 @@
                 </a:solidFill>
                 <a:latin typeface="Segoe UI"/>
               </a:rPr>
-              <a:t>Parte: 3 — Estadística Inferencial y Causal · Fuente: ISLP, cap. 13 Multiple Testing + Benjamini &amp; Hochberg (1995).  Duración estimada: 70 min.</a:t>
+              <a:t>Parte: 3 — Estadística Inferencial y Causal · Fuente: ISLP, cap. 13 Multiple Testing + Benjamini &amp; Hochberg (1995).  Duración estimada: 70 min. · Nivel: Intermedio-Avanzado</a:t>
             </a:r>
           </a:p>
         </p:txBody>
